--- a/examples/07_enterprise_cdp/Presentation.pptx
+++ b/examples/07_enterprise_cdp/Presentation.pptx
@@ -7,10 +7,9 @@
   <p:sldIdLst>
     <p:sldId id="256" r:id="rId2"/>
     <p:sldId id="257" r:id="rId3"/>
-    <p:sldId id="258" r:id="rId4"/>
   </p:sldIdLst>
   <p:notesMasterIdLst>
-    <p:notesMasterId r:id="rId5"/>
+    <p:notesMasterId r:id="rId4"/>
   </p:notesMasterIdLst>
   <p:sldSz cx="12192000" cy="6858000"/>
   <p:notesSz cx="6858000" cy="12192000"/>
@@ -504,8 +503,8 @@
           <a:p>
             <a:r>
               <a:rPr lang="en-US" dirty="0"/>
-              <a:t>1. Hero
-note: [오프닝] 분산된 고객 데이터를 실시간 단일 뷰로 통합하는 엔터프라이즈 CDP 플랫폼을 발표합니다.</a:t>
+              <a:t>Slide 1: Modern Linear SaaS Hero
+note: 리니어 스타일 모던 B2B SaaS 고객 데이터 플랫폼 소개입니다.</a:t>
             </a:r>
             <a:endParaRPr lang="en-US" dirty="0"/>
           </a:p>
@@ -593,8 +592,7 @@
           <a:p>
             <a:r>
               <a:rPr lang="en-US" dirty="0"/>
-              <a:t>2. Big Stats
-note: [성과] 전환율 340% 향상과 50ms 실시간 업데이트를 보장합니다.</a:t>
+              <a:t>Slide 2: SaaS Architecture Pillars</a:t>
             </a:r>
             <a:endParaRPr lang="en-US" dirty="0"/>
           </a:p>
@@ -618,95 +616,6 @@
             <a:fld id="{F7021451-1387-4CA6-816F-3879F97B5CBC}" type="slidenum">
               <a:rPr lang="en-US"/>
               <a:t>2</a:t>
-            </a:fld>
-            <a:endParaRPr lang="en-US"/>
-          </a:p>
-        </p:txBody>
-      </p:sp>
-    </p:spTree>
-    <p:extLst>
-      <p:ext uri="{BB962C8B-B14F-4D97-AF65-F5344CB8AC3E}">
-        <p14:creationId xmlns:p14="http://schemas.microsoft.com/office/powerpoint/2010/main" val="1024086991"/>
-      </p:ext>
-    </p:extLst>
-  </p:cSld>
-  <p:clrMapOvr>
-    <a:masterClrMapping/>
-  </p:clrMapOvr>
-</p:notes>
-</file>
-
-<file path=ppt/notesSlides/notesSlide3.xml><?xml version="1.0" encoding="utf-8"?>
-<p:notes xmlns:a="http://schemas.openxmlformats.org/drawingml/2006/main" xmlns:r="http://schemas.openxmlformats.org/officeDocument/2006/relationships" xmlns:p="http://schemas.openxmlformats.org/presentationml/2006/main">
-  <p:cSld>
-    <p:spTree>
-      <p:nvGrpSpPr>
-        <p:cNvPr id="1" name=""/>
-        <p:cNvGrpSpPr/>
-        <p:nvPr/>
-      </p:nvGrpSpPr>
-      <p:grpSpPr>
-        <a:xfrm>
-          <a:off x="0" y="0"/>
-          <a:ext cx="0" cy="0"/>
-          <a:chOff x="0" y="0"/>
-          <a:chExt cx="0" cy="0"/>
-        </a:xfrm>
-      </p:grpSpPr>
-      <p:sp>
-        <p:nvSpPr>
-          <p:cNvPr id="2" name="Slide Image Placeholder 1"/>
-          <p:cNvSpPr>
-            <a:spLocks noGrp="1" noRot="1" noChangeAspect="1"/>
-          </p:cNvSpPr>
-          <p:nvPr>
-            <p:ph type="sldImg"/>
-          </p:nvPr>
-        </p:nvSpPr>
-        <p:spPr/>
-      </p:sp>
-      <p:sp>
-        <p:nvSpPr>
-          <p:cNvPr id="3" name="Notes Placeholder 2"/>
-          <p:cNvSpPr>
-            <a:spLocks noGrp="1"/>
-          </p:cNvSpPr>
-          <p:nvPr>
-            <p:ph type="body" idx="1"/>
-          </p:nvPr>
-        </p:nvSpPr>
-        <p:spPr/>
-        <p:txBody>
-          <a:bodyPr/>
-          <a:lstStyle/>
-          <a:p>
-            <a:r>
-              <a:rPr lang="en-US" dirty="0"/>
-              <a:t>3. Closing
-note: [마무리] 경청해 주셔서 감사합니다. 질문을 받겠습니다.</a:t>
-            </a:r>
-            <a:endParaRPr lang="en-US" dirty="0"/>
-          </a:p>
-        </p:txBody>
-      </p:sp>
-      <p:sp>
-        <p:nvSpPr>
-          <p:cNvPr id="4" name="Slide Number Placeholder 3"/>
-          <p:cNvSpPr>
-            <a:spLocks noGrp="1"/>
-          </p:cNvSpPr>
-          <p:nvPr>
-            <p:ph type="sldNum" sz="quarter" idx="10"/>
-          </p:nvPr>
-        </p:nvSpPr>
-        <p:spPr/>
-        <p:txBody>
-          <a:bodyPr/>
-          <a:lstStyle/>
-          <a:p>
-            <a:fld id="{F7021451-1387-4CA6-816F-3879F97B5CBC}" type="slidenum">
-              <a:rPr lang="en-US"/>
-              <a:t>3</a:t>
             </a:fld>
             <a:endParaRPr lang="en-US"/>
           </a:p>
@@ -1074,45 +983,6 @@
 <file path=ppt/slides/slide2.xml><?xml version="1.0" encoding="utf-8"?>
 <p:sld xmlns:a="http://schemas.openxmlformats.org/drawingml/2006/main" xmlns:r="http://schemas.openxmlformats.org/officeDocument/2006/relationships" xmlns:p="http://schemas.openxmlformats.org/presentationml/2006/main">
   <p:cSld name="Slide 2">
-    <p:bg>
-      <p:bgPr>
-        <a:blipFill dpi="0" rotWithShape="1">
-          <a:blip r:embed="rId1">
-            <a:lum/>
-          </a:blip>
-          <a:srcRect/>
-          <a:stretch>
-            <a:fillRect/>
-          </a:stretch>
-        </a:blipFill>
-        <a:effectLst/>
-      </p:bgPr>
-    </p:bg>
-    <p:spTree>
-      <p:nvGrpSpPr>
-        <p:cNvPr id="1" name=""/>
-        <p:cNvGrpSpPr/>
-        <p:nvPr/>
-      </p:nvGrpSpPr>
-      <p:grpSpPr>
-        <a:xfrm>
-          <a:off x="0" y="0"/>
-          <a:ext cx="0" cy="0"/>
-          <a:chOff x="0" y="0"/>
-          <a:chExt cx="0" cy="0"/>
-        </a:xfrm>
-      </p:grpSpPr>
-    </p:spTree>
-  </p:cSld>
-  <p:clrMapOvr>
-    <a:masterClrMapping/>
-  </p:clrMapOvr>
-</p:sld>
-</file>
-
-<file path=ppt/slides/slide3.xml><?xml version="1.0" encoding="utf-8"?>
-<p:sld xmlns:a="http://schemas.openxmlformats.org/drawingml/2006/main" xmlns:r="http://schemas.openxmlformats.org/officeDocument/2006/relationships" xmlns:p="http://schemas.openxmlformats.org/presentationml/2006/main">
-  <p:cSld name="Slide 3">
     <p:bg>
       <p:bgPr>
         <a:blipFill dpi="0" rotWithShape="1">

--- a/examples/07_enterprise_cdp/Presentation.pptx
+++ b/examples/07_enterprise_cdp/Presentation.pptx
@@ -503,8 +503,7 @@
           <a:p>
             <a:r>
               <a:rPr lang="en-US" dirty="0"/>
-              <a:t>Slide 1: Modern Linear SaaS Hero
-note: 리니어 스타일 모던 B2B SaaS 고객 데이터 플랫폼 소개입니다.</a:t>
+              <a:t>리니어 스타일 모던 B2B SaaS 고객 데이터 플랫폼 소개입니다.</a:t>
             </a:r>
             <a:endParaRPr lang="en-US" dirty="0"/>
           </a:p>
@@ -592,7 +591,7 @@
           <a:p>
             <a:r>
               <a:rPr lang="en-US" dirty="0"/>
-              <a:t>Slide 2: SaaS Architecture Pillars</a:t>
+              <a:t/>
             </a:r>
             <a:endParaRPr lang="en-US" dirty="0"/>
           </a:p>
@@ -946,16 +945,9 @@
   <p:cSld name="Slide 1">
     <p:bg>
       <p:bgPr>
-        <a:blipFill dpi="0" rotWithShape="1">
-          <a:blip r:embed="rId1">
-            <a:lum/>
-          </a:blip>
-          <a:srcRect/>
-          <a:stretch>
-            <a:fillRect/>
-          </a:stretch>
-        </a:blipFill>
-        <a:effectLst/>
+        <a:solidFill>
+          <a:srgbClr val="FFFFFF"/>
+        </a:solidFill>
       </p:bgPr>
     </p:bg>
     <p:spTree>
@@ -972,6 +964,602 @@
           <a:chExt cx="0" cy="0"/>
         </a:xfrm>
       </p:grpSpPr>
+      <p:sp>
+        <p:nvSpPr>
+          <p:cNvPr id="2" name="Shape 0"/>
+          <p:cNvSpPr/>
+          <p:nvPr/>
+        </p:nvSpPr>
+        <p:spPr>
+          <a:xfrm>
+            <a:off x="571500" y="504840"/>
+            <a:ext cx="2413467" cy="374447"/>
+          </a:xfrm>
+          <a:prstGeom prst="roundRect">
+            <a:avLst>
+              <a:gd name="adj" fmla="val 49988"/>
+            </a:avLst>
+          </a:prstGeom>
+          <a:solidFill>
+            <a:srgbClr val="EEF2FF"/>
+          </a:solidFill>
+          <a:ln w="9525">
+            <a:solidFill>
+              <a:srgbClr val="C7D2FE"/>
+            </a:solidFill>
+            <a:prstDash val="solid"/>
+          </a:ln>
+        </p:spPr>
+      </p:sp>
+      <p:sp>
+        <p:nvSpPr>
+          <p:cNvPr id="3" name="Text 1"/>
+          <p:cNvSpPr txBox="1"/>
+          <p:nvPr/>
+        </p:nvSpPr>
+        <p:spPr>
+          <a:xfrm>
+            <a:off x="676290" y="541416"/>
+            <a:ext cx="2358146" cy="298369"/>
+          </a:xfrm>
+          <a:prstGeom prst="rect">
+            <a:avLst/>
+          </a:prstGeom>
+          <a:noFill/>
+          <a:ln/>
+        </p:spPr>
+        <p:txBody>
+          <a:bodyPr wrap="none" lIns="0" tIns="0" rIns="0" bIns="0" rtlCol="0" anchor="t"/>
+          <a:lstStyle/>
+          <a:p>
+            <a:pPr algn="l" indent="0" marL="0">
+              <a:lnSpc>
+                <a:spcPts val="2349"/>
+              </a:lnSpc>
+              <a:buNone/>
+            </a:pPr>
+            <a:r>
+              <a:rPr lang="en-US" sz="1566" b="1" spc="-54" kern="0" dirty="0">
+                <a:solidFill>
+                  <a:srgbClr val="4F46E5"/>
+                </a:solidFill>
+                <a:latin typeface="Malgun Gothic" pitchFamily="34" charset="0"/>
+                <a:ea typeface="Malgun Gothic" pitchFamily="34" charset="-122"/>
+                <a:cs typeface="Malgun Gothic" pitchFamily="34" charset="-120"/>
+              </a:rPr>
+              <a:t>ENTERPRISE PLATFORM</a:t>
+            </a:r>
+            <a:endParaRPr lang="en-US" sz="1566" dirty="0"/>
+          </a:p>
+        </p:txBody>
+      </p:sp>
+      <p:sp>
+        <p:nvSpPr>
+          <p:cNvPr id="4" name="Text 2"/>
+          <p:cNvSpPr txBox="1"/>
+          <p:nvPr/>
+        </p:nvSpPr>
+        <p:spPr>
+          <a:xfrm>
+            <a:off x="552480" y="947044"/>
+            <a:ext cx="11087100" cy="1519276"/>
+          </a:xfrm>
+          <a:prstGeom prst="rect">
+            <a:avLst/>
+          </a:prstGeom>
+          <a:noFill/>
+          <a:ln/>
+        </p:spPr>
+        <p:txBody>
+          <a:bodyPr wrap="square" lIns="0" tIns="0" rIns="0" bIns="0" rtlCol="0" anchor="t"/>
+          <a:lstStyle/>
+          <a:p>
+            <a:pPr algn="l" indent="0" marL="0">
+              <a:lnSpc>
+                <a:spcPts val="5981"/>
+              </a:lnSpc>
+              <a:buNone/>
+            </a:pPr>
+            <a:r>
+              <a:rPr lang="en-US" sz="4785" b="1" spc="-54" kern="0" dirty="0">
+                <a:solidFill>
+                  <a:srgbClr val="0F172A"/>
+                </a:solidFill>
+                <a:latin typeface="Malgun Gothic" pitchFamily="34" charset="0"/>
+                <a:ea typeface="Malgun Gothic" pitchFamily="34" charset="-122"/>
+                <a:cs typeface="Malgun Gothic" pitchFamily="34" charset="-120"/>
+              </a:rPr>
+              <a:t>옴니채널 고객 데이터 통합을 위한</a:t>
+            </a:r>
+            <a:endParaRPr lang="en-US" sz="4785" dirty="0"/>
+          </a:p>
+          <a:p>
+            <a:pPr algn="l" indent="0" marL="0">
+              <a:lnSpc>
+                <a:spcPts val="5981"/>
+              </a:lnSpc>
+              <a:buNone/>
+            </a:pPr>
+            <a:r>
+              <a:rPr lang="en-US" sz="4785" b="1" spc="-54" kern="0" dirty="0">
+                <a:solidFill>
+                  <a:srgbClr val="4F46E5"/>
+                </a:solidFill>
+                <a:latin typeface="Malgun Gothic" pitchFamily="34" charset="0"/>
+                <a:ea typeface="Malgun Gothic" pitchFamily="34" charset="-122"/>
+                <a:cs typeface="Malgun Gothic" pitchFamily="34" charset="-120"/>
+              </a:rPr>
+              <a:t>실시간 AI-Native CDP 플랫폼</a:t>
+            </a:r>
+            <a:endParaRPr lang="en-US" sz="4785" dirty="0"/>
+          </a:p>
+        </p:txBody>
+      </p:sp>
+      <p:sp>
+        <p:nvSpPr>
+          <p:cNvPr id="5" name="Shape 3"/>
+          <p:cNvSpPr/>
+          <p:nvPr/>
+        </p:nvSpPr>
+        <p:spPr>
+          <a:xfrm>
+            <a:off x="571500" y="4343857"/>
+            <a:ext cx="28621" cy="571317"/>
+          </a:xfrm>
+          <a:prstGeom prst="rect">
+            <a:avLst/>
+          </a:prstGeom>
+          <a:solidFill>
+            <a:srgbClr val="4F46E5"/>
+          </a:solidFill>
+          <a:ln/>
+        </p:spPr>
+      </p:sp>
+      <p:sp>
+        <p:nvSpPr>
+          <p:cNvPr id="6" name="Text 4"/>
+          <p:cNvSpPr txBox="1"/>
+          <p:nvPr/>
+        </p:nvSpPr>
+        <p:spPr>
+          <a:xfrm>
+            <a:off x="733440" y="4416278"/>
+            <a:ext cx="6228161" cy="217170"/>
+          </a:xfrm>
+          <a:prstGeom prst="rect">
+            <a:avLst/>
+          </a:prstGeom>
+          <a:noFill/>
+          <a:ln/>
+        </p:spPr>
+        <p:txBody>
+          <a:bodyPr wrap="none" lIns="0" tIns="0" rIns="0" bIns="0" rtlCol="0" anchor="t"/>
+          <a:lstStyle/>
+          <a:p>
+            <a:pPr algn="l" indent="0" marL="0">
+              <a:lnSpc>
+                <a:spcPts val="1710"/>
+              </a:lnSpc>
+              <a:buNone/>
+            </a:pPr>
+            <a:r>
+              <a:rPr lang="en-US" sz="1140" b="1" spc="-54" kern="0" dirty="0">
+                <a:solidFill>
+                  <a:srgbClr val="4F46E5"/>
+                </a:solidFill>
+                <a:latin typeface="Malgun Gothic" pitchFamily="34" charset="0"/>
+                <a:ea typeface="Malgun Gothic" pitchFamily="34" charset="-122"/>
+                <a:cs typeface="Malgun Gothic" pitchFamily="34" charset="-120"/>
+              </a:rPr>
+              <a:t>01. 단일 고객 ID 실시간 매핑</a:t>
+            </a:r>
+            <a:endParaRPr lang="en-US" sz="1140" dirty="0"/>
+          </a:p>
+        </p:txBody>
+      </p:sp>
+      <p:sp>
+        <p:nvSpPr>
+          <p:cNvPr id="7" name="Text 5"/>
+          <p:cNvSpPr txBox="1"/>
+          <p:nvPr/>
+        </p:nvSpPr>
+        <p:spPr>
+          <a:xfrm>
+            <a:off x="733440" y="4655210"/>
+            <a:ext cx="6228161" cy="182880"/>
+          </a:xfrm>
+          <a:prstGeom prst="rect">
+            <a:avLst/>
+          </a:prstGeom>
+          <a:noFill/>
+          <a:ln/>
+        </p:spPr>
+        <p:txBody>
+          <a:bodyPr wrap="none" lIns="0" tIns="0" rIns="0" bIns="0" rtlCol="0" anchor="t"/>
+          <a:lstStyle/>
+          <a:p>
+            <a:pPr algn="l" indent="0" marL="0">
+              <a:lnSpc>
+                <a:spcPts val="1440"/>
+              </a:lnSpc>
+              <a:buNone/>
+            </a:pPr>
+            <a:r>
+              <a:rPr lang="en-US" sz="960" spc="-54" kern="0" dirty="0">
+                <a:solidFill>
+                  <a:srgbClr val="64748B"/>
+                </a:solidFill>
+                <a:latin typeface="Malgun Gothic" pitchFamily="34" charset="0"/>
+                <a:ea typeface="Malgun Gothic" pitchFamily="34" charset="-122"/>
+                <a:cs typeface="Malgun Gothic" pitchFamily="34" charset="-120"/>
+              </a:rPr>
+              <a:t>결제, 웹로그, CS 상담 기록을 50ms 내 실시간 병합</a:t>
+            </a:r>
+            <a:endParaRPr lang="en-US" sz="960" dirty="0"/>
+          </a:p>
+        </p:txBody>
+      </p:sp>
+      <p:sp>
+        <p:nvSpPr>
+          <p:cNvPr id="8" name="Shape 6"/>
+          <p:cNvSpPr/>
+          <p:nvPr/>
+        </p:nvSpPr>
+        <p:spPr>
+          <a:xfrm>
+            <a:off x="571500" y="5029474"/>
+            <a:ext cx="28621" cy="571317"/>
+          </a:xfrm>
+          <a:prstGeom prst="rect">
+            <a:avLst/>
+          </a:prstGeom>
+          <a:solidFill>
+            <a:srgbClr val="E2E8F0"/>
+          </a:solidFill>
+          <a:ln/>
+        </p:spPr>
+      </p:sp>
+      <p:sp>
+        <p:nvSpPr>
+          <p:cNvPr id="9" name="Text 7"/>
+          <p:cNvSpPr txBox="1"/>
+          <p:nvPr/>
+        </p:nvSpPr>
+        <p:spPr>
+          <a:xfrm>
+            <a:off x="733440" y="5101895"/>
+            <a:ext cx="6228161" cy="217170"/>
+          </a:xfrm>
+          <a:prstGeom prst="rect">
+            <a:avLst/>
+          </a:prstGeom>
+          <a:noFill/>
+          <a:ln/>
+        </p:spPr>
+        <p:txBody>
+          <a:bodyPr wrap="none" lIns="0" tIns="0" rIns="0" bIns="0" rtlCol="0" anchor="t"/>
+          <a:lstStyle/>
+          <a:p>
+            <a:pPr algn="l" indent="0" marL="0">
+              <a:lnSpc>
+                <a:spcPts val="1710"/>
+              </a:lnSpc>
+              <a:buNone/>
+            </a:pPr>
+            <a:r>
+              <a:rPr lang="en-US" sz="1140" b="1" spc="-54" kern="0" dirty="0">
+                <a:solidFill>
+                  <a:srgbClr val="0F172A"/>
+                </a:solidFill>
+                <a:latin typeface="Malgun Gothic" pitchFamily="34" charset="0"/>
+                <a:ea typeface="Malgun Gothic" pitchFamily="34" charset="-122"/>
+                <a:cs typeface="Malgun Gothic" pitchFamily="34" charset="-120"/>
+              </a:rPr>
+              <a:t>02. AI 자동 세그먼트 생성</a:t>
+            </a:r>
+            <a:endParaRPr lang="en-US" sz="1140" dirty="0"/>
+          </a:p>
+        </p:txBody>
+      </p:sp>
+      <p:sp>
+        <p:nvSpPr>
+          <p:cNvPr id="10" name="Text 8"/>
+          <p:cNvSpPr txBox="1"/>
+          <p:nvPr/>
+        </p:nvSpPr>
+        <p:spPr>
+          <a:xfrm>
+            <a:off x="733440" y="5340919"/>
+            <a:ext cx="6228161" cy="182880"/>
+          </a:xfrm>
+          <a:prstGeom prst="rect">
+            <a:avLst/>
+          </a:prstGeom>
+          <a:noFill/>
+          <a:ln/>
+        </p:spPr>
+        <p:txBody>
+          <a:bodyPr wrap="none" lIns="0" tIns="0" rIns="0" bIns="0" rtlCol="0" anchor="t"/>
+          <a:lstStyle/>
+          <a:p>
+            <a:pPr algn="l" indent="0" marL="0">
+              <a:lnSpc>
+                <a:spcPts val="1440"/>
+              </a:lnSpc>
+              <a:buNone/>
+            </a:pPr>
+            <a:r>
+              <a:rPr lang="en-US" sz="960" spc="-54" kern="0" dirty="0">
+                <a:solidFill>
+                  <a:srgbClr val="64748B"/>
+                </a:solidFill>
+                <a:latin typeface="Malgun Gothic" pitchFamily="34" charset="0"/>
+                <a:ea typeface="Malgun Gothic" pitchFamily="34" charset="-122"/>
+                <a:cs typeface="Malgun Gothic" pitchFamily="34" charset="-120"/>
+              </a:rPr>
+              <a:t>이탈 확률 80% 이상 VIP 고객 자동 선별 및 트리거 발송</a:t>
+            </a:r>
+            <a:endParaRPr lang="en-US" sz="960" dirty="0"/>
+          </a:p>
+        </p:txBody>
+      </p:sp>
+      <p:sp>
+        <p:nvSpPr>
+          <p:cNvPr id="11" name="Shape 9"/>
+          <p:cNvSpPr/>
+          <p:nvPr/>
+        </p:nvSpPr>
+        <p:spPr>
+          <a:xfrm>
+            <a:off x="571500" y="5715183"/>
+            <a:ext cx="28621" cy="571317"/>
+          </a:xfrm>
+          <a:prstGeom prst="rect">
+            <a:avLst/>
+          </a:prstGeom>
+          <a:solidFill>
+            <a:srgbClr val="E2E8F0"/>
+          </a:solidFill>
+          <a:ln/>
+        </p:spPr>
+      </p:sp>
+      <p:sp>
+        <p:nvSpPr>
+          <p:cNvPr id="12" name="Text 10"/>
+          <p:cNvSpPr txBox="1"/>
+          <p:nvPr/>
+        </p:nvSpPr>
+        <p:spPr>
+          <a:xfrm>
+            <a:off x="733440" y="5787603"/>
+            <a:ext cx="6228161" cy="217170"/>
+          </a:xfrm>
+          <a:prstGeom prst="rect">
+            <a:avLst/>
+          </a:prstGeom>
+          <a:noFill/>
+          <a:ln/>
+        </p:spPr>
+        <p:txBody>
+          <a:bodyPr wrap="none" lIns="0" tIns="0" rIns="0" bIns="0" rtlCol="0" anchor="t"/>
+          <a:lstStyle/>
+          <a:p>
+            <a:pPr algn="l" indent="0" marL="0">
+              <a:lnSpc>
+                <a:spcPts val="1710"/>
+              </a:lnSpc>
+              <a:buNone/>
+            </a:pPr>
+            <a:r>
+              <a:rPr lang="en-US" sz="1140" b="1" spc="-54" kern="0" dirty="0">
+                <a:solidFill>
+                  <a:srgbClr val="0F172A"/>
+                </a:solidFill>
+                <a:latin typeface="Malgun Gothic" pitchFamily="34" charset="0"/>
+                <a:ea typeface="Malgun Gothic" pitchFamily="34" charset="-122"/>
+                <a:cs typeface="Malgun Gothic" pitchFamily="34" charset="-120"/>
+              </a:rPr>
+              <a:t>03. 200+ 엔터프라이즈 커넥터</a:t>
+            </a:r>
+            <a:endParaRPr lang="en-US" sz="1140" dirty="0"/>
+          </a:p>
+        </p:txBody>
+      </p:sp>
+      <p:sp>
+        <p:nvSpPr>
+          <p:cNvPr id="13" name="Text 11"/>
+          <p:cNvSpPr txBox="1"/>
+          <p:nvPr/>
+        </p:nvSpPr>
+        <p:spPr>
+          <a:xfrm>
+            <a:off x="733440" y="6026536"/>
+            <a:ext cx="6228161" cy="182880"/>
+          </a:xfrm>
+          <a:prstGeom prst="rect">
+            <a:avLst/>
+          </a:prstGeom>
+          <a:noFill/>
+          <a:ln/>
+        </p:spPr>
+        <p:txBody>
+          <a:bodyPr wrap="none" lIns="0" tIns="0" rIns="0" bIns="0" rtlCol="0" anchor="t"/>
+          <a:lstStyle/>
+          <a:p>
+            <a:pPr algn="l" indent="0" marL="0">
+              <a:lnSpc>
+                <a:spcPts val="1440"/>
+              </a:lnSpc>
+              <a:buNone/>
+            </a:pPr>
+            <a:r>
+              <a:rPr lang="en-US" sz="960" spc="-54" kern="0" dirty="0">
+                <a:solidFill>
+                  <a:srgbClr val="64748B"/>
+                </a:solidFill>
+                <a:latin typeface="Malgun Gothic" pitchFamily="34" charset="0"/>
+                <a:ea typeface="Malgun Gothic" pitchFamily="34" charset="-122"/>
+                <a:cs typeface="Malgun Gothic" pitchFamily="34" charset="-120"/>
+              </a:rPr>
+              <a:t>Salesforce, Snowflake, AWS와 노코드 즉시 연동</a:t>
+            </a:r>
+            <a:endParaRPr lang="en-US" sz="960" dirty="0"/>
+          </a:p>
+        </p:txBody>
+      </p:sp>
+      <p:sp>
+        <p:nvSpPr>
+          <p:cNvPr id="14" name="Shape 12"/>
+          <p:cNvSpPr/>
+          <p:nvPr/>
+        </p:nvSpPr>
+        <p:spPr>
+          <a:xfrm>
+            <a:off x="6768389" y="4598975"/>
+            <a:ext cx="4852172" cy="1546708"/>
+          </a:xfrm>
+          <a:prstGeom prst="roundRect">
+            <a:avLst>
+              <a:gd name="adj" fmla="val 7390"/>
+            </a:avLst>
+          </a:prstGeom>
+          <a:solidFill>
+            <a:srgbClr val="F8FAFC"/>
+          </a:solidFill>
+          <a:ln w="9525">
+            <a:solidFill>
+              <a:srgbClr val="E2E8F0"/>
+            </a:solidFill>
+            <a:prstDash val="solid"/>
+          </a:ln>
+        </p:spPr>
+      </p:sp>
+      <p:sp>
+        <p:nvSpPr>
+          <p:cNvPr id="15" name="Text 13"/>
+          <p:cNvSpPr txBox="1"/>
+          <p:nvPr/>
+        </p:nvSpPr>
+        <p:spPr>
+          <a:xfrm>
+            <a:off x="6656466" y="4837085"/>
+            <a:ext cx="5076017" cy="171450"/>
+          </a:xfrm>
+          <a:prstGeom prst="rect">
+            <a:avLst/>
+          </a:prstGeom>
+          <a:noFill/>
+          <a:ln/>
+        </p:spPr>
+        <p:txBody>
+          <a:bodyPr wrap="none" lIns="0" tIns="0" rIns="0" bIns="0" rtlCol="0" anchor="t"/>
+          <a:lstStyle/>
+          <a:p>
+            <a:pPr algn="ctr" indent="0" marL="0">
+              <a:lnSpc>
+                <a:spcPts val="1350"/>
+              </a:lnSpc>
+              <a:buNone/>
+            </a:pPr>
+            <a:r>
+              <a:rPr lang="en-US" sz="900" b="1" spc="-54" kern="0" dirty="0">
+                <a:solidFill>
+                  <a:srgbClr val="64748B"/>
+                </a:solidFill>
+                <a:latin typeface="Malgun Gothic" pitchFamily="34" charset="0"/>
+                <a:ea typeface="Malgun Gothic" pitchFamily="34" charset="-122"/>
+                <a:cs typeface="Malgun Gothic" pitchFamily="34" charset="-120"/>
+              </a:rPr>
+              <a:t>PROVEN CONVERSION LIFT</a:t>
+            </a:r>
+            <a:endParaRPr lang="en-US" sz="900" dirty="0"/>
+          </a:p>
+        </p:txBody>
+      </p:sp>
+      <p:sp>
+        <p:nvSpPr>
+          <p:cNvPr id="16" name="Text 14"/>
+          <p:cNvSpPr txBox="1"/>
+          <p:nvPr/>
+        </p:nvSpPr>
+        <p:spPr>
+          <a:xfrm>
+            <a:off x="6656466" y="5040904"/>
+            <a:ext cx="5076017" cy="640080"/>
+          </a:xfrm>
+          <a:prstGeom prst="rect">
+            <a:avLst/>
+          </a:prstGeom>
+          <a:noFill/>
+          <a:ln/>
+        </p:spPr>
+        <p:txBody>
+          <a:bodyPr wrap="none" lIns="0" tIns="0" rIns="0" bIns="0" rtlCol="0" anchor="t"/>
+          <a:lstStyle/>
+          <a:p>
+            <a:pPr algn="ctr" indent="0" marL="0">
+              <a:lnSpc>
+                <a:spcPts val="5040"/>
+              </a:lnSpc>
+              <a:buNone/>
+            </a:pPr>
+            <a:r>
+              <a:rPr lang="en-US" sz="3360" b="1" spc="-54" kern="0" dirty="0">
+                <a:solidFill>
+                  <a:srgbClr val="4F46E5"/>
+                </a:solidFill>
+                <a:latin typeface="Malgun Gothic" pitchFamily="34" charset="0"/>
+                <a:ea typeface="Malgun Gothic" pitchFamily="34" charset="-122"/>
+                <a:cs typeface="Malgun Gothic" pitchFamily="34" charset="-120"/>
+              </a:rPr>
+              <a:t>+340%</a:t>
+            </a:r>
+            <a:endParaRPr lang="en-US" sz="3360" dirty="0"/>
+          </a:p>
+        </p:txBody>
+      </p:sp>
+      <p:sp>
+        <p:nvSpPr>
+          <p:cNvPr id="17" name="Text 15"/>
+          <p:cNvSpPr txBox="1"/>
+          <p:nvPr/>
+        </p:nvSpPr>
+        <p:spPr>
+          <a:xfrm>
+            <a:off x="6656466" y="5723778"/>
+            <a:ext cx="5076017" cy="182880"/>
+          </a:xfrm>
+          <a:prstGeom prst="rect">
+            <a:avLst/>
+          </a:prstGeom>
+          <a:noFill/>
+          <a:ln/>
+        </p:spPr>
+        <p:txBody>
+          <a:bodyPr wrap="none" lIns="0" tIns="0" rIns="0" bIns="0" rtlCol="0" anchor="t"/>
+          <a:lstStyle/>
+          <a:p>
+            <a:pPr algn="ctr" indent="0" marL="0">
+              <a:lnSpc>
+                <a:spcPts val="1440"/>
+              </a:lnSpc>
+              <a:buNone/>
+            </a:pPr>
+            <a:r>
+              <a:rPr lang="en-US" sz="960" b="1" spc="-54" kern="0" dirty="0">
+                <a:solidFill>
+                  <a:srgbClr val="0F172A"/>
+                </a:solidFill>
+                <a:latin typeface="Malgun Gothic" pitchFamily="34" charset="0"/>
+                <a:ea typeface="Malgun Gothic" pitchFamily="34" charset="-122"/>
+                <a:cs typeface="Malgun Gothic" pitchFamily="34" charset="-120"/>
+              </a:rPr>
+              <a:t>80여 개 대기업 실증 완료</a:t>
+            </a:r>
+            <a:endParaRPr lang="en-US" sz="960" dirty="0"/>
+          </a:p>
+        </p:txBody>
+      </p:sp>
     </p:spTree>
   </p:cSld>
   <p:clrMapOvr>
@@ -985,16 +1573,9 @@
   <p:cSld name="Slide 2">
     <p:bg>
       <p:bgPr>
-        <a:blipFill dpi="0" rotWithShape="1">
-          <a:blip r:embed="rId1">
-            <a:lum/>
-          </a:blip>
-          <a:srcRect/>
-          <a:stretch>
-            <a:fillRect/>
-          </a:stretch>
-        </a:blipFill>
-        <a:effectLst/>
+        <a:solidFill>
+          <a:srgbClr val="FFFFFF"/>
+        </a:solidFill>
       </p:bgPr>
     </p:bg>
     <p:spTree>
@@ -1011,6 +1592,492 @@
           <a:chExt cx="0" cy="0"/>
         </a:xfrm>
       </p:grpSpPr>
+      <p:sp>
+        <p:nvSpPr>
+          <p:cNvPr id="2" name="Shape 0"/>
+          <p:cNvSpPr/>
+          <p:nvPr/>
+        </p:nvSpPr>
+        <p:spPr>
+          <a:xfrm>
+            <a:off x="571500" y="504840"/>
+            <a:ext cx="2200046" cy="374447"/>
+          </a:xfrm>
+          <a:prstGeom prst="roundRect">
+            <a:avLst>
+              <a:gd name="adj" fmla="val 49988"/>
+            </a:avLst>
+          </a:prstGeom>
+          <a:solidFill>
+            <a:srgbClr val="EEF2FF"/>
+          </a:solidFill>
+          <a:ln w="9525">
+            <a:solidFill>
+              <a:srgbClr val="C7D2FE"/>
+            </a:solidFill>
+            <a:prstDash val="solid"/>
+          </a:ln>
+        </p:spPr>
+      </p:sp>
+      <p:sp>
+        <p:nvSpPr>
+          <p:cNvPr id="3" name="Text 1"/>
+          <p:cNvSpPr txBox="1"/>
+          <p:nvPr/>
+        </p:nvSpPr>
+        <p:spPr>
+          <a:xfrm>
+            <a:off x="676290" y="541416"/>
+            <a:ext cx="2127717" cy="298369"/>
+          </a:xfrm>
+          <a:prstGeom prst="rect">
+            <a:avLst/>
+          </a:prstGeom>
+          <a:noFill/>
+          <a:ln/>
+        </p:spPr>
+        <p:txBody>
+          <a:bodyPr wrap="none" lIns="0" tIns="0" rIns="0" bIns="0" rtlCol="0" anchor="t"/>
+          <a:lstStyle/>
+          <a:p>
+            <a:pPr algn="l" indent="0" marL="0">
+              <a:lnSpc>
+                <a:spcPts val="2349"/>
+              </a:lnSpc>
+              <a:buNone/>
+            </a:pPr>
+            <a:r>
+              <a:rPr lang="en-US" sz="1566" b="1" spc="-54" kern="0" dirty="0">
+                <a:solidFill>
+                  <a:srgbClr val="4F46E5"/>
+                </a:solidFill>
+                <a:latin typeface="Malgun Gothic" pitchFamily="34" charset="0"/>
+                <a:ea typeface="Malgun Gothic" pitchFamily="34" charset="-122"/>
+                <a:cs typeface="Malgun Gothic" pitchFamily="34" charset="-120"/>
+              </a:rPr>
+              <a:t>CORE VALUE PILLARS</a:t>
+            </a:r>
+            <a:endParaRPr lang="en-US" sz="1566" dirty="0"/>
+          </a:p>
+        </p:txBody>
+      </p:sp>
+      <p:sp>
+        <p:nvSpPr>
+          <p:cNvPr id="4" name="Text 2"/>
+          <p:cNvSpPr txBox="1"/>
+          <p:nvPr/>
+        </p:nvSpPr>
+        <p:spPr>
+          <a:xfrm>
+            <a:off x="552480" y="926836"/>
+            <a:ext cx="11951940" cy="304770"/>
+          </a:xfrm>
+          <a:prstGeom prst="rect">
+            <a:avLst/>
+          </a:prstGeom>
+          <a:noFill/>
+          <a:ln/>
+        </p:spPr>
+        <p:txBody>
+          <a:bodyPr wrap="none" lIns="0" tIns="0" rIns="0" bIns="0" rtlCol="0" anchor="t"/>
+          <a:lstStyle/>
+          <a:p>
+            <a:pPr algn="l" indent="0" marL="0">
+              <a:lnSpc>
+                <a:spcPts val="2400"/>
+              </a:lnSpc>
+              <a:buNone/>
+            </a:pPr>
+            <a:r>
+              <a:rPr lang="en-US" sz="1920" b="1" spc="-54" kern="0" dirty="0">
+                <a:solidFill>
+                  <a:srgbClr val="0F172A"/>
+                </a:solidFill>
+                <a:latin typeface="Malgun Gothic" pitchFamily="34" charset="0"/>
+                <a:ea typeface="Malgun Gothic" pitchFamily="34" charset="-122"/>
+                <a:cs typeface="Malgun Gothic" pitchFamily="34" charset="-120"/>
+              </a:rPr>
+              <a:t>엔터프라이즈 성장을 견인하는 3대 아키텍처</a:t>
+            </a:r>
+            <a:endParaRPr lang="en-US" sz="1920" dirty="0"/>
+          </a:p>
+        </p:txBody>
+      </p:sp>
+      <p:sp>
+        <p:nvSpPr>
+          <p:cNvPr id="5" name="Shape 3"/>
+          <p:cNvSpPr/>
+          <p:nvPr/>
+        </p:nvSpPr>
+        <p:spPr>
+          <a:xfrm>
+            <a:off x="571500" y="3270992"/>
+            <a:ext cx="3581430" cy="1039856"/>
+          </a:xfrm>
+          <a:prstGeom prst="roundRect">
+            <a:avLst>
+              <a:gd name="adj" fmla="val 9163"/>
+            </a:avLst>
+          </a:prstGeom>
+          <a:solidFill>
+            <a:srgbClr val="F8FAFC"/>
+          </a:solidFill>
+          <a:ln w="9525">
+            <a:solidFill>
+              <a:srgbClr val="E2E8F0"/>
+            </a:solidFill>
+            <a:prstDash val="solid"/>
+          </a:ln>
+        </p:spPr>
+      </p:sp>
+      <p:sp>
+        <p:nvSpPr>
+          <p:cNvPr id="6" name="Text 4"/>
+          <p:cNvSpPr txBox="1"/>
+          <p:nvPr/>
+        </p:nvSpPr>
+        <p:spPr>
+          <a:xfrm>
+            <a:off x="752460" y="3467222"/>
+            <a:ext cx="3454878" cy="217170"/>
+          </a:xfrm>
+          <a:prstGeom prst="rect">
+            <a:avLst/>
+          </a:prstGeom>
+          <a:noFill/>
+          <a:ln/>
+        </p:spPr>
+        <p:txBody>
+          <a:bodyPr wrap="none" lIns="0" tIns="0" rIns="0" bIns="0" rtlCol="0" anchor="t"/>
+          <a:lstStyle/>
+          <a:p>
+            <a:pPr algn="l" indent="0" marL="0">
+              <a:lnSpc>
+                <a:spcPts val="1710"/>
+              </a:lnSpc>
+              <a:buNone/>
+            </a:pPr>
+            <a:r>
+              <a:rPr lang="en-US" sz="1140" b="1" spc="-54" kern="0" dirty="0">
+                <a:solidFill>
+                  <a:srgbClr val="4F46E5"/>
+                </a:solidFill>
+                <a:latin typeface="Malgun Gothic" pitchFamily="34" charset="0"/>
+                <a:ea typeface="Malgun Gothic" pitchFamily="34" charset="-122"/>
+                <a:cs typeface="Malgun Gothic" pitchFamily="34" charset="-120"/>
+              </a:rPr>
+              <a:t>실시간 데이터 스트리밍</a:t>
+            </a:r>
+            <a:endParaRPr lang="en-US" sz="1140" dirty="0"/>
+          </a:p>
+        </p:txBody>
+      </p:sp>
+      <p:sp>
+        <p:nvSpPr>
+          <p:cNvPr id="7" name="Text 5"/>
+          <p:cNvSpPr txBox="1"/>
+          <p:nvPr/>
+        </p:nvSpPr>
+        <p:spPr>
+          <a:xfrm>
+            <a:off x="752460" y="3744285"/>
+            <a:ext cx="3219420" cy="365760"/>
+          </a:xfrm>
+          <a:prstGeom prst="rect">
+            <a:avLst/>
+          </a:prstGeom>
+          <a:noFill/>
+          <a:ln/>
+        </p:spPr>
+        <p:txBody>
+          <a:bodyPr wrap="square" lIns="0" tIns="0" rIns="0" bIns="0" rtlCol="0" anchor="t"/>
+          <a:lstStyle/>
+          <a:p>
+            <a:pPr algn="l" indent="0" marL="0">
+              <a:lnSpc>
+                <a:spcPts val="1440"/>
+              </a:lnSpc>
+              <a:buNone/>
+            </a:pPr>
+            <a:r>
+              <a:rPr lang="en-US" sz="960" spc="-54" kern="0" dirty="0">
+                <a:solidFill>
+                  <a:srgbClr val="475569"/>
+                </a:solidFill>
+                <a:latin typeface="Malgun Gothic" pitchFamily="34" charset="0"/>
+                <a:ea typeface="Malgun Gothic" pitchFamily="34" charset="-122"/>
+                <a:cs typeface="Malgun Gothic" pitchFamily="34" charset="-120"/>
+              </a:rPr>
+              <a:t>초당 50만 건의 트래픽을 지연 없이 처리하는 Apache Flink 기반 분산 엔진</a:t>
+            </a:r>
+            <a:endParaRPr lang="en-US" sz="960" dirty="0"/>
+          </a:p>
+        </p:txBody>
+      </p:sp>
+      <p:sp>
+        <p:nvSpPr>
+          <p:cNvPr id="8" name="Shape 6"/>
+          <p:cNvSpPr/>
+          <p:nvPr/>
+        </p:nvSpPr>
+        <p:spPr>
+          <a:xfrm>
+            <a:off x="4305270" y="3270992"/>
+            <a:ext cx="3581430" cy="1039856"/>
+          </a:xfrm>
+          <a:prstGeom prst="roundRect">
+            <a:avLst>
+              <a:gd name="adj" fmla="val 9163"/>
+            </a:avLst>
+          </a:prstGeom>
+          <a:solidFill>
+            <a:srgbClr val="F8FAFC"/>
+          </a:solidFill>
+          <a:ln w="9525">
+            <a:solidFill>
+              <a:srgbClr val="E2E8F0"/>
+            </a:solidFill>
+            <a:prstDash val="solid"/>
+          </a:ln>
+        </p:spPr>
+      </p:sp>
+      <p:sp>
+        <p:nvSpPr>
+          <p:cNvPr id="9" name="Text 7"/>
+          <p:cNvSpPr txBox="1"/>
+          <p:nvPr/>
+        </p:nvSpPr>
+        <p:spPr>
+          <a:xfrm>
+            <a:off x="4486321" y="3467222"/>
+            <a:ext cx="3454878" cy="217170"/>
+          </a:xfrm>
+          <a:prstGeom prst="rect">
+            <a:avLst/>
+          </a:prstGeom>
+          <a:noFill/>
+          <a:ln/>
+        </p:spPr>
+        <p:txBody>
+          <a:bodyPr wrap="none" lIns="0" tIns="0" rIns="0" bIns="0" rtlCol="0" anchor="t"/>
+          <a:lstStyle/>
+          <a:p>
+            <a:pPr algn="l" indent="0" marL="0">
+              <a:lnSpc>
+                <a:spcPts val="1710"/>
+              </a:lnSpc>
+              <a:buNone/>
+            </a:pPr>
+            <a:r>
+              <a:rPr lang="en-US" sz="1140" b="1" spc="-54" kern="0" dirty="0">
+                <a:solidFill>
+                  <a:srgbClr val="0F172A"/>
+                </a:solidFill>
+                <a:latin typeface="Malgun Gothic" pitchFamily="34" charset="0"/>
+                <a:ea typeface="Malgun Gothic" pitchFamily="34" charset="-122"/>
+                <a:cs typeface="Malgun Gothic" pitchFamily="34" charset="-120"/>
+              </a:rPr>
+              <a:t>AI 행동 예측 세그먼트</a:t>
+            </a:r>
+            <a:endParaRPr lang="en-US" sz="1140" dirty="0"/>
+          </a:p>
+        </p:txBody>
+      </p:sp>
+      <p:sp>
+        <p:nvSpPr>
+          <p:cNvPr id="10" name="Text 8"/>
+          <p:cNvSpPr txBox="1"/>
+          <p:nvPr/>
+        </p:nvSpPr>
+        <p:spPr>
+          <a:xfrm>
+            <a:off x="4486321" y="3744285"/>
+            <a:ext cx="3454878" cy="182880"/>
+          </a:xfrm>
+          <a:prstGeom prst="rect">
+            <a:avLst/>
+          </a:prstGeom>
+          <a:noFill/>
+          <a:ln/>
+        </p:spPr>
+        <p:txBody>
+          <a:bodyPr wrap="none" lIns="0" tIns="0" rIns="0" bIns="0" rtlCol="0" anchor="t"/>
+          <a:lstStyle/>
+          <a:p>
+            <a:pPr algn="l" indent="0" marL="0">
+              <a:lnSpc>
+                <a:spcPts val="1440"/>
+              </a:lnSpc>
+              <a:buNone/>
+            </a:pPr>
+            <a:r>
+              <a:rPr lang="en-US" sz="960" spc="-54" kern="0" dirty="0">
+                <a:solidFill>
+                  <a:srgbClr val="475569"/>
+                </a:solidFill>
+                <a:latin typeface="Malgun Gothic" pitchFamily="34" charset="0"/>
+                <a:ea typeface="Malgun Gothic" pitchFamily="34" charset="-122"/>
+                <a:cs typeface="Malgun Gothic" pitchFamily="34" charset="-120"/>
+              </a:rPr>
+              <a:t>고객 생애 가치(LTV)와 이탈 확률을 실시간으로 추론하여 마케팅 자동화</a:t>
+            </a:r>
+            <a:endParaRPr lang="en-US" sz="960" dirty="0"/>
+          </a:p>
+        </p:txBody>
+      </p:sp>
+      <p:sp>
+        <p:nvSpPr>
+          <p:cNvPr id="11" name="Shape 9"/>
+          <p:cNvSpPr/>
+          <p:nvPr/>
+        </p:nvSpPr>
+        <p:spPr>
+          <a:xfrm>
+            <a:off x="8039130" y="3270992"/>
+            <a:ext cx="3581430" cy="1039856"/>
+          </a:xfrm>
+          <a:prstGeom prst="roundRect">
+            <a:avLst>
+              <a:gd name="adj" fmla="val 9163"/>
+            </a:avLst>
+          </a:prstGeom>
+          <a:solidFill>
+            <a:srgbClr val="F8FAFC"/>
+          </a:solidFill>
+          <a:ln w="9525">
+            <a:solidFill>
+              <a:srgbClr val="E2E8F0"/>
+            </a:solidFill>
+            <a:prstDash val="solid"/>
+          </a:ln>
+        </p:spPr>
+      </p:sp>
+      <p:sp>
+        <p:nvSpPr>
+          <p:cNvPr id="12" name="Text 10"/>
+          <p:cNvSpPr txBox="1"/>
+          <p:nvPr/>
+        </p:nvSpPr>
+        <p:spPr>
+          <a:xfrm>
+            <a:off x="8220090" y="3467222"/>
+            <a:ext cx="3454878" cy="217170"/>
+          </a:xfrm>
+          <a:prstGeom prst="rect">
+            <a:avLst/>
+          </a:prstGeom>
+          <a:noFill/>
+          <a:ln/>
+        </p:spPr>
+        <p:txBody>
+          <a:bodyPr wrap="none" lIns="0" tIns="0" rIns="0" bIns="0" rtlCol="0" anchor="t"/>
+          <a:lstStyle/>
+          <a:p>
+            <a:pPr algn="l" indent="0" marL="0">
+              <a:lnSpc>
+                <a:spcPts val="1710"/>
+              </a:lnSpc>
+              <a:buNone/>
+            </a:pPr>
+            <a:r>
+              <a:rPr lang="en-US" sz="1140" b="1" spc="-54" kern="0" dirty="0">
+                <a:solidFill>
+                  <a:srgbClr val="0F172A"/>
+                </a:solidFill>
+                <a:latin typeface="Malgun Gothic" pitchFamily="34" charset="0"/>
+                <a:ea typeface="Malgun Gothic" pitchFamily="34" charset="-122"/>
+                <a:cs typeface="Malgun Gothic" pitchFamily="34" charset="-120"/>
+              </a:rPr>
+              <a:t>글로벌 보안 컴플라이언스</a:t>
+            </a:r>
+            <a:endParaRPr lang="en-US" sz="1140" dirty="0"/>
+          </a:p>
+        </p:txBody>
+      </p:sp>
+      <p:sp>
+        <p:nvSpPr>
+          <p:cNvPr id="13" name="Text 11"/>
+          <p:cNvSpPr txBox="1"/>
+          <p:nvPr/>
+        </p:nvSpPr>
+        <p:spPr>
+          <a:xfrm>
+            <a:off x="8220090" y="3744285"/>
+            <a:ext cx="3219420" cy="365760"/>
+          </a:xfrm>
+          <a:prstGeom prst="rect">
+            <a:avLst/>
+          </a:prstGeom>
+          <a:noFill/>
+          <a:ln/>
+        </p:spPr>
+        <p:txBody>
+          <a:bodyPr wrap="square" lIns="0" tIns="0" rIns="0" bIns="0" rtlCol="0" anchor="t"/>
+          <a:lstStyle/>
+          <a:p>
+            <a:pPr algn="l" indent="0" marL="0">
+              <a:lnSpc>
+                <a:spcPts val="1440"/>
+              </a:lnSpc>
+              <a:buNone/>
+            </a:pPr>
+            <a:r>
+              <a:rPr lang="en-US" sz="960" spc="-54" kern="0" dirty="0">
+                <a:solidFill>
+                  <a:srgbClr val="475569"/>
+                </a:solidFill>
+                <a:latin typeface="Malgun Gothic" pitchFamily="34" charset="0"/>
+                <a:ea typeface="Malgun Gothic" pitchFamily="34" charset="-122"/>
+                <a:cs typeface="Malgun Gothic" pitchFamily="34" charset="-120"/>
+              </a:rPr>
+              <a:t>GDPR, SOC2 Type II, PIPA를 완벽히 준수하는 엔터프라이즈 암호화 체계</a:t>
+            </a:r>
+            <a:endParaRPr lang="en-US" sz="960" dirty="0"/>
+          </a:p>
+        </p:txBody>
+      </p:sp>
+      <p:sp>
+        <p:nvSpPr>
+          <p:cNvPr id="14" name="Text 12"/>
+          <p:cNvSpPr txBox="1"/>
+          <p:nvPr/>
+        </p:nvSpPr>
+        <p:spPr>
+          <a:xfrm>
+            <a:off x="-312450" y="6229350"/>
+            <a:ext cx="12816870" cy="171450"/>
+          </a:xfrm>
+          <a:prstGeom prst="rect">
+            <a:avLst/>
+          </a:prstGeom>
+          <a:noFill/>
+          <a:ln/>
+        </p:spPr>
+        <p:txBody>
+          <a:bodyPr wrap="none" lIns="0" tIns="0" rIns="0" bIns="0" rtlCol="0" anchor="t"/>
+          <a:lstStyle/>
+          <a:p>
+            <a:pPr algn="ctr" indent="0" marL="0">
+              <a:lnSpc>
+                <a:spcPts val="1350"/>
+              </a:lnSpc>
+              <a:buNone/>
+            </a:pPr>
+            <a:r>
+              <a:rPr lang="en-US" sz="900" spc="-54" kern="0" dirty="0">
+                <a:solidFill>
+                  <a:srgbClr val="475569"/>
+                </a:solidFill>
+                <a:latin typeface="Malgun Gothic" pitchFamily="34" charset="0"/>
+                <a:ea typeface="Malgun Gothic" pitchFamily="34" charset="-122"/>
+                <a:cs typeface="Malgun Gothic" pitchFamily="34" charset="-120"/>
+              </a:rPr>
+              <a:t>TRUSTED BY 80+ GLOBAL ENTERPRISES ACROSS FINTECH, COMMERCE, AND MOBILITY</a:t>
+            </a:r>
+            <a:endParaRPr lang="en-US" sz="900" dirty="0"/>
+          </a:p>
+        </p:txBody>
+      </p:sp>
     </p:spTree>
   </p:cSld>
   <p:clrMapOvr>
